--- a/slides/demo/UrBox Meeting Copilot - Demo 10.2026.pptx
+++ b/slides/demo/UrBox Meeting Copilot - Demo 10.2026.pptx
@@ -18,6 +18,8 @@
     <p:sldId id="266" r:id="rId18"/>
     <p:sldId id="267" r:id="rId19"/>
     <p:sldId id="268" r:id="rId20"/>
+    <p:sldId id="269" r:id="rId21"/>
+    <p:sldId id="270" r:id="rId22"/>
   </p:sldIdLst>
   <p:sldSz cx="12192000" cy="6858000" type="screen4x3"/>
   <p:notesSz cx="6858000" cy="9144000"/>
@@ -514,7 +516,7 @@
           <a:lstStyle/>
           <a:p>
             <a:r>
-              <a:t>Dạ em chào anh chị. Em là Jarvis, trợ lý họp của UrBox. Hôm nay em xin phép tự giới thiệu về chính mình: UrBox Meeting Copilot. Bộ slide anh chị đang xem cũng do em mở và trình bày. Em sẽ nói khoảng mười phút về những việc em làm được trong một cuộc họp. Sau đó anh Phúc sẽ demo trực tiếp trên hệ thống để anh chị thấy em làm việc thật.</a:t>
+              <a:t>Dạ em chào anh chị. Em là Jarvis, trợ lý họp của UrBox. Hôm nay em tự trình bày về chính mình: UrBox Meeting Copilot. Điều em muốn anh chị nhớ nhất là: em hỗ trợ ngay trong lúc đang họp, không chỉ ghi chép sau buổi họp. Em sẽ đi qua những điểm khác biệt, hai tình huống dùng thực tế là họp với khách và phỏng vấn, cách em hoạt động về kỹ thuật, rồi đến phần demo trực tiếp.</a:t>
             </a:r>
           </a:p>
         </p:txBody>
@@ -584,7 +586,7 @@
           <a:lstStyle/>
           <a:p>
             <a:r>
-              <a:t>Với đội kinh doanh, có chế độ BD. Khi khách hỏi, em tự nhận ra câu hỏi và gợi ý câu trả lời trên một bảng riêng chỉ đội mình thấy, không lên màn hình chung và em không đọc thành tiếng. Câu trả lời lấy từ tài liệu của nhóm như bảng giá, chính sách, và từ các buổi họp trước, có đánh dấu nguồn. Em cũng ghi chú cho đội mình, ví dụ lần trước đã báo giá khác. Cần thông tin bên ngoài thì bấm tra thêm trên mạng, em ghi rõ đây là thông tin chưa kiểm chứng. Chủ nhóm còn hỏi được báo cáo trên toàn bộ cuộc họp, ví dụ các câu phàn nàn của khách.</a:t>
+              <a:t>Em nhớ xuyên các cuộc họp trong cùng một nhóm. Khi lập biên bản, em so với những điều nhóm đã chốt ở tối đa mười hai buổi trước: quyết định, con số, hạn chót, người phụ trách. Nếu buổi này nói khác, ví dụ ngày phát hành voucher là hai mươi tháng mười hai trong khi buổi trước đã chốt mười lăm, em ghi rõ trong biên bản kèm buổi họp nào. Em không ngắt lời trong lúc họp, chỉ ghi lại để mọi người xem xét.</a:t>
             </a:r>
           </a:p>
         </p:txBody>
@@ -654,7 +656,7 @@
           <a:lstStyle/>
           <a:p>
             <a:r>
-              <a:t>Về dữ liệu: chỉ tài khoản Google của công ty mới đăng nhập được. Mỗi cuộc họp chỉ người tạo và thành viên trong nhóm xem được. Ghi âm mặc định tắt, chỉ bật khi mọi người trong phòng đồng ý, và tự xóa sau ba mươi ngày. Mẫu giọng là dữ liệu sinh trắc học theo Nghị định mười ba, nên chỉ lưu khi người đó đồng ý. Tài liệu của nhóm chỉ giữ phần chữ, tệp gốc không lưu trên máy chủ.</a:t>
+              <a:t>Trong lúc họp, anh chị gọi em bằng tiếng Việt như gọi một đồng nghiệp: Jarvis ơi, tóm tắt các quyết định từ đầu buổi, hay liệt kê việc cần làm và người phụ trách. Em trả lời bằng giọng nói ngay, vừa làm vừa báo em đang làm gì. Em tra được thông tin trên mạng và dữ liệu nội bộ qua chuẩn MCP. Hiện phần Jira đang dùng dữ liệu mẫu; nối Jira thật là bước tiếp theo, cần sự hỗ trợ của team Engineering.</a:t>
             </a:r>
           </a:p>
         </p:txBody>
@@ -724,7 +726,7 @@
           <a:lstStyle/>
           <a:p>
             <a:r>
-              <a:t>Hiện trên bản web đã có đăng nhập Google, chép lời và nhận ra người nói, trợ lý Jarvis, biên bản tự động, nhóm cuộc họp và chế độ BD. Trước khi mở rộng, nhóm cần thử với cuộc họp thật ở vài phòng ban, kiểm tra lưu Google Drive, lịch Google và bot Meet với tài khoản thật, và thống nhất cùng IT, Pháp chế về ghi âm và việc dùng gói AI cá nhân. Em rất mong nhận được góp ý của anh chị sau buổi hôm nay.</a:t>
+              <a:t>Phần còn lại là những tính năng cơ bản, giống các công cụ khác: chép lời, tóm tắt, biên bản Word, việc cần làm, bot vào Google Meet theo lịch, lưu Google Drive. Ngoài ra em có vài tiện ích bổ sung: soạn slide, dựng dashboard, vẽ sơ đồ tư duy bằng một câu nói, và mở tệp PowerPoint để tự trình bày, như chính bộ slide anh chị đang xem. Đây không phải trọng tâm, nhưng có sẵn khi cần.</a:t>
             </a:r>
           </a:p>
         </p:txBody>
@@ -794,7 +796,147 @@
           <a:lstStyle/>
           <a:p>
             <a:r>
-              <a:t>Phần trình bày của em đến đây là hết. Bây giờ em xin mời anh Phúc demo trực tiếp trên hệ thống: tạo cuộc họp, gọi em tóm tắt và vẽ dashboard, kết thúc để xem biên bản, và thử bảng BD khi khách hỏi giá. Em cảm ơn anh chị đã lắng nghe.</a:t>
+              <a:t>Về dữ liệu, em liệt kê rõ những gì gửi ra ngoài: âm thanh tới Soniox để chép lời, nội dung cần AI xử lý tới Anthropic, âm thanh Google Meet qua Recall và được xóa sau một giờ, biên bản lưu ở Google Drive của chính người dùng. Chỉ tài khoản Google của công ty đăng nhập được, mỗi cuộc họp chỉ người tạo và thành viên nhóm xem được. Ghi âm và mẫu giọng chỉ lưu khi có đồng ý. Em đề xuất các anh chị review luồng dữ liệu này trước khi mở rộng.</a:t>
+            </a:r>
+          </a:p>
+        </p:txBody>
+      </p:sp>
+      <p:sp>
+        <p:nvSpPr>
+          <p:cNvPr id="4" name="Slide Number Placeholder 3"/>
+          <p:cNvSpPr>
+            <a:spLocks noGrp="1"/>
+          </p:cNvSpPr>
+          <p:nvPr>
+            <p:ph type="sldNum" idx="5" sz="quarter"/>
+          </p:nvPr>
+        </p:nvSpPr>
+        <p:spPr/>
+      </p:sp>
+    </p:spTree>
+  </p:cSld>
+  <p:clrMapOvr>
+    <a:masterClrMapping/>
+  </p:clrMapOvr>
+</p:notes>
+</file>
+
+<file path=ppt/notesSlides/notesSlide14.xml><?xml version="1.0" encoding="utf-8"?>
+<p:notes xmlns:a="http://schemas.openxmlformats.org/drawingml/2006/main" xmlns:p="http://schemas.openxmlformats.org/presentationml/2006/main" xmlns:r="http://schemas.openxmlformats.org/officeDocument/2006/relationships">
+  <p:cSld>
+    <p:spTree>
+      <p:nvGrpSpPr>
+        <p:cNvPr id="1" name=""/>
+        <p:cNvGrpSpPr/>
+        <p:nvPr/>
+      </p:nvGrpSpPr>
+      <p:grpSpPr>
+        <a:xfrm>
+          <a:off x="0" y="0"/>
+          <a:ext cx="0" cy="0"/>
+          <a:chOff x="0" y="0"/>
+          <a:chExt cx="0" cy="0"/>
+        </a:xfrm>
+      </p:grpSpPr>
+      <p:sp>
+        <p:nvSpPr>
+          <p:cNvPr id="2" name="Slide Image Placeholder 1"/>
+          <p:cNvSpPr>
+            <a:spLocks noGrp="1"/>
+          </p:cNvSpPr>
+          <p:nvPr>
+            <p:ph type="sldImg" idx="2"/>
+          </p:nvPr>
+        </p:nvSpPr>
+        <p:spPr/>
+      </p:sp>
+      <p:sp>
+        <p:nvSpPr>
+          <p:cNvPr id="3" name="Notes Placeholder 2"/>
+          <p:cNvSpPr>
+            <a:spLocks noGrp="1"/>
+          </p:cNvSpPr>
+          <p:nvPr>
+            <p:ph type="body" idx="3" sz="quarter"/>
+          </p:nvPr>
+        </p:nvSpPr>
+        <p:spPr/>
+        <p:txBody>
+          <a:bodyPr/>
+          <a:lstStyle/>
+          <a:p>
+            <a:r>
+              <a:t>Hiện bản web đã chạy, có ba trăm bảy mươi sáu bài kiểm thử, chế độ BD và phỏng vấn đã thử với AI thật. Những phần chưa kiểm chứng gồm lưu Google Drive, lịch và bot Google Meet với tài khoản thật, độ chính xác nhận giọng trên nhiều cuộc họp hơn, và khi nhiều phòng họp chạy cùng lúc. Em đề xuất thử ở team Engineering và team BD bằng các cuộc họp thật. Từ team Engineering, em cần ba việc: review bảo mật và hạ tầng, hỗ trợ nối Jira thật, và cho em thử ở các buổi sprint review và phỏng vấn tuyển dụng.</a:t>
+            </a:r>
+          </a:p>
+        </p:txBody>
+      </p:sp>
+      <p:sp>
+        <p:nvSpPr>
+          <p:cNvPr id="4" name="Slide Number Placeholder 3"/>
+          <p:cNvSpPr>
+            <a:spLocks noGrp="1"/>
+          </p:cNvSpPr>
+          <p:nvPr>
+            <p:ph type="sldNum" idx="5" sz="quarter"/>
+          </p:nvPr>
+        </p:nvSpPr>
+        <p:spPr/>
+      </p:sp>
+    </p:spTree>
+  </p:cSld>
+  <p:clrMapOvr>
+    <a:masterClrMapping/>
+  </p:clrMapOvr>
+</p:notes>
+</file>
+
+<file path=ppt/notesSlides/notesSlide15.xml><?xml version="1.0" encoding="utf-8"?>
+<p:notes xmlns:a="http://schemas.openxmlformats.org/drawingml/2006/main" xmlns:p="http://schemas.openxmlformats.org/presentationml/2006/main" xmlns:r="http://schemas.openxmlformats.org/officeDocument/2006/relationships">
+  <p:cSld>
+    <p:spTree>
+      <p:nvGrpSpPr>
+        <p:cNvPr id="1" name=""/>
+        <p:cNvGrpSpPr/>
+        <p:nvPr/>
+      </p:nvGrpSpPr>
+      <p:grpSpPr>
+        <a:xfrm>
+          <a:off x="0" y="0"/>
+          <a:ext cx="0" cy="0"/>
+          <a:chOff x="0" y="0"/>
+          <a:chExt cx="0" cy="0"/>
+        </a:xfrm>
+      </p:grpSpPr>
+      <p:sp>
+        <p:nvSpPr>
+          <p:cNvPr id="2" name="Slide Image Placeholder 1"/>
+          <p:cNvSpPr>
+            <a:spLocks noGrp="1"/>
+          </p:cNvSpPr>
+          <p:nvPr>
+            <p:ph type="sldImg" idx="2"/>
+          </p:nvPr>
+        </p:nvSpPr>
+        <p:spPr/>
+      </p:sp>
+      <p:sp>
+        <p:nvSpPr>
+          <p:cNvPr id="3" name="Notes Placeholder 2"/>
+          <p:cNvSpPr>
+            <a:spLocks noGrp="1"/>
+          </p:cNvSpPr>
+          <p:nvPr>
+            <p:ph type="body" idx="3" sz="quarter"/>
+          </p:nvPr>
+        </p:nvSpPr>
+        <p:spPr/>
+        <p:txBody>
+          <a:bodyPr/>
+          <a:lstStyle/>
+          <a:p>
+            <a:r>
+              <a:t>Phần trình bày của em đến đây là hết. Bây giờ em mời anh Phúc demo trực tiếp, theo đúng thứ tự ưu tiên: họp với khách trước, rồi phỏng vấn, nhận ra người nói, cuối cùng là tóm tắt và biên bản. Em cảm ơn anh chị đã lắng nghe.</a:t>
             </a:r>
           </a:p>
         </p:txBody>
@@ -864,7 +1006,7 @@
           <a:lstStyle/>
           <a:p>
             <a:r>
-              <a:t>Trước hết là chuyện quen thuộc. Trong mỗi cuộc họp luôn có một người vừa nghe vừa chép, nên rất dễ sót ý hoặc nhầm ai nói gì. Họp xong lại mất thêm thời gian để viết biên bản, liệt kê quyết định, người phụ trách và hạn chót. Sang buổi sau, có khi mình nói khác điều đã chốt ở buổi trước mà không ai nhận ra. Còn với đội kinh doanh, khi khách hỏi giá hay chính sách, anh chị phải mở tài liệu, tìm lại cuộc họp cũ ngay trước mặt khách.</a:t>
+              <a:t>Ghi chú họp hiện có nhiều công cụ tốt, như Gemini trong Google Meet, Otter hay Fireflies: chép lời, tóm tắt, liệt kê việc cần làm sau buổi họp. Nhưng lúc cần trợ giúp nhất lại xảy ra ngay giữa buổi: khách hỏi một điều đội BD chưa nắm, ứng viên nhắc tới một kỹ thuật mà người phỏng vấn muốn hỏi sâu hơn, buổi này nói khác điều đã chốt ở buổi trước, hay họp trực tiếp đông người mà biên bản không rõ ai nói gì. Những lúc đó cần dữ liệu riêng của UrBox, và cần ngay.</a:t>
             </a:r>
           </a:p>
         </p:txBody>
@@ -934,7 +1076,7 @@
           <a:lstStyle/>
           <a:p>
             <a:r>
-              <a:t>Meeting Copilot giải quyết bằng một trợ lý ngồi trong mọi cuộc họp, làm bốn việc. Một, em nghe và chép lời theo thời gian thực, nhận ra từng người nói. Hai, anh chị gọi em bằng giọng nói để tóm tắt, soạn slide, vẽ dashboard hay tra cứu. Ba, em ghi nhớ: tự lập biên bản, lưu theo nhóm, và so với các buổi trước. Bốn, với đội kinh doanh, em gợi ý câu trả lời khi khách hỏi. Anh chị dùng ngay trên trình duyệt, đăng nhập bằng tài khoản Google của công ty.</a:t>
+              <a:t>Em có năm điểm khác so với các công cụ ghi chú họp phổ biến. Một, khi khách hỏi, em gợi ý câu trả lời ngay, lấy từ tài liệu và các buổi họp trước của UrBox, có dấu nguồn, trên một bảng riêng chỉ đội mình thấy. Đây là tính năng em ưu tiên nhất. Hai, khi phỏng vấn, em là trợ lý riêng của người phỏng vấn. Ba, em nhận ra người nói bằng mẫu giọng, kể cả khi họp trực tiếp. Bốn, em nhớ xuyên các cuộc họp. Năm, em nói tiếng Việt và dữ liệu nằm trên hạ tầng của UrBox. Còn chép lời, biên bản là phần cơ bản, em để ở cuối.</a:t>
             </a:r>
           </a:p>
         </p:txBody>
@@ -1004,7 +1146,7 @@
           <a:lstStyle/>
           <a:p>
             <a:r>
-              <a:t>Đầu tiên là chép lời. Khi mọi người nói, chữ hiện ra ngay, mỗi người một màu. Ai đã lưu mẫu giọng thì em tự nhận ra và hiện đúng tên. Khi có người tự giới thiệu hoặc được gọi tên, em đoán tên và hỏi lại nếu chưa chắc. Nếu em gán nhầm người nói, anh chị chỉ cần bấm vào câu đó để sửa. Mẫu giọng chỉ được lưu khi người đó đồng ý.</a:t>
+              <a:t>Tình huống đầu tiên, cũng là tính năng em ưu tiên nhất: họp với khách. Khách hỏi: phí tích hợp API bao nhiêu, có khác lần trước không? Chỉ vài giây sau, trên bảng riêng của đội BD đã có gợi ý: năm triệu đồng, thu một lần, lấy từ bảng giá. Em còn ghi chú: buổi ngày hai tháng mười, đội mình đã báo bốn triệu, nên giải thích phần chênh lệch. Đội BD trả lời được ngay, kể cả khi chưa nắm câu đó, và biết thông tin lấy từ đâu.</a:t>
             </a:r>
           </a:p>
         </p:txBody>
@@ -1074,7 +1216,7 @@
           <a:lstStyle/>
           <a:p>
             <a:r>
-              <a:t>Trong lúc họp, anh chị gọi em như gọi một đồng nghiệp: Jarvis ơi, tóm tắt các quyết định từ đầu buổi. Hoặc: liệt kê việc cần làm, người phụ trách và hạn chót. Em trả lời ngay, vừa làm vừa báo em đang làm gì. Em cũng tra được thông tin trên mạng, ví dụ tỷ giá hôm nay. Nếu không tiện nói, anh chị gõ vào khung chat, không cần gọi tên.</a:t>
+              <a:t>Về cách hoạt động: em chỉ xét câu của người được đánh dấu là khách, bỏ qua lời chào và câu xác nhận. Em tìm trong tài liệu của nhóm như bảng giá, hồ sơ năng lực, và trong biên bản, lời nói của các buổi trước. Rồi em viết gợi ý ngắn, có dấu nguồn, kèm ghi chú cho đội và mức độ chắc chắn. Cần thông tin bên ngoài thì đội bấm tra thêm trên mạng. Việc tìm kiếm chạy ngay trên server, không cần cơ sở dữ liệu vector. Mỗi câu gợi ý tốn khoảng hai trăm năm mươi đồng.</a:t>
             </a:r>
           </a:p>
         </p:txBody>
@@ -1144,7 +1286,7 @@
           <a:lstStyle/>
           <a:p>
             <a:r>
-              <a:t>Chỉ với một câu nói, em soạn được bộ slide, dựng dashboard có biểu đồ, hoặc vẽ sơ đồ tư duy các ý chính của cuộc họp. Muốn sửa, anh chị cũng chỉ cần nói, ví dụ: đổi biểu đồ cột thành biểu đồ đường. Mỗi lần sửa là một phiên bản mới, nên anh chị luôn quay lại được bản cũ. Trên sơ đồ tư duy, bấm vào ý nào là em giải thích ý đó.</a:t>
+              <a:t>Tình huống thứ hai là phỏng vấn. Ứng viên kể đã xử lý sự cố mất message bằng outbox pattern. Người phỏng vấn gõ vào bảng riêng: gợi ý ba câu hỏi khai thác sâu. Em trả lời ngay ba câu bám theo tiêu chí trong mô tả công việc, như cách phát hiện sự cố và cách thiết kế chống ghi trùng. Gặp thuật ngữ chưa rõ, người phỏng vấn hỏi em, em giải thích và tra thêm trên mạng có nguồn. Khi ứng viên hỏi về chế độ làm việc, em trả lời theo mô tả công việc. Tính năng này dùng được ngay cho các buổi tuyển dụng của team Engineering.</a:t>
             </a:r>
           </a:p>
         </p:txBody>
@@ -1214,7 +1356,7 @@
           <a:lstStyle/>
           <a:p>
             <a:r>
-              <a:t>Mọi thứ em soạn đều chiếu được lên màn hình chung. Em có thể tự thuyết trình từng slide, hoặc lắng nghe người đang trình bày và tự chuyển slide theo lời nói. Em cũng mở được tệp PDF, PowerPoint trên máy để trình bày, theo ghi chú trong tệp hoặc theo kịch bản anh chị đưa. Và thật ra, anh chị đang xem chính tính năng này: bộ slide hôm nay em mở từ tệp PowerPoint và đọc theo ghi chú trong tệp.</a:t>
+              <a:t>Phần nhận ra người nói. Với mỗi câu nói, em tính một vector giọng gồm một trăm chín mươi hai con số, chạy ngay trên server, rồi so với hồ sơ giọng nói của công ty. Khớp thì em hiện đúng tên, kèm số câu và thời lượng nói của từng người. Người lần đầu tham gia sẽ hiện là người nói mới; khi họ tự giới thiệu hoặc được gọi tên, em đoán tên và gắn vào, chưa chắc thì em hỏi lại. Nếu người đó đồng ý, em lưu mẫu giọng, từ buổi sau em tự nhận ra. Đo trên hai cuộc họp thật nội bộ, em gán đúng người nói chín mươi bảy và chín mươi tám phần trăm số câu.</a:t>
             </a:r>
           </a:p>
         </p:txBody>
@@ -1284,7 +1426,7 @@
           <a:lstStyle/>
           <a:p>
             <a:r>
-              <a:t>Khi kết thúc cuộc họp, em lập biên bản gồm tóm tắt, các quyết định, bảng phân công và rủi ro. Với cuộc họp trong nhóm, em còn so với những điều nhóm đã chốt ở tối đa mười hai buổi trước. Có điểm nào nói khác, em ghi rõ trong biên bản, như câu nhắc trên slide về ngày phát hành voucher. Biên bản tải được dạng Word, lưu lên Google Drive của nhóm hoặc vào thư mục trên máy.</a:t>
+              <a:t>Về thời gian thực, em đưa số đo thực tế. Chữ hiện ngay khi đang nói. Tính vector giọng chỉ mất khoảng không phẩy mười một giây cho mỗi giây âm thanh. Gợi ý trả lời khi khách hỏi mất từ bốn đến tám giây. Bốn câu hỏi cùng lúc xong trong bảy đến chín giây vì chạy song song. Tra thêm trên mạng mất mười lăm đến hai mươi lăm giây. Mỗi câu gợi ý tốn khoảng hai trăm năm mươi đồng. Các số này đo với dữ liệu mẫu, sẽ thay đổi theo mạng và tải.</a:t>
             </a:r>
           </a:p>
         </p:txBody>
@@ -1354,7 +1496,7 @@
           <a:lstStyle/>
           <a:p>
             <a:r>
-              <a:t>Cuộc họp được gom theo nhóm, theo chủ đề hay phòng ban. Thành viên nhóm xem chung cuộc họp và biên bản, và biên bản tự lưu vào thư mục của nhóm trên Google Drive. Nếu anh chị kết nối lịch Google, bot của em tự vào các cuộc họp Google Meet trên lịch, chép lời từng người online đúng tên trong Meet. Họp nửa online nửa trực tiếp vẫn chép đủ cả hai phía.</a:t>
+              <a:t>Phần này dành cho anh chị bên kỹ thuật. Âm thanh đến từ mic trên trình duyệt khi họp trực tiếp, hoặc từ bot Google Meet với mỗi người một luồng riêng, gửi qua WebSocket tới một server FastAPI chạy Docker trên Render. Server tự tách người nói, tính vector giọng và tìm kiếm tài liệu. Chép lời dùng Soniox, phần AI dùng Claude Sonnet năm phẩy năm qua API của công ty, dữ liệu lưu ở MongoDB Atlas của UrBox. Nhà cung cấp AI đổi được, ví dụ sang Gemini. Mã nguồn có ba trăm bảy mươi sáu bài kiểm thử tự động.</a:t>
             </a:r>
           </a:p>
         </p:txBody>
@@ -4405,26 +4547,20 @@
           <a:p>
             <a:r>
               <a:rPr sz="1400"/>
-              <a:t>Trợ lý cuộc họp AI: nghe, ghi nhớ và gợi ý ngay trong buổi họp</a:t>
+              <a:t>Trợ lý AI hỗ trợ ngay trong lúc họp</a:t>
             </a:r>
           </a:p>
           <a:p>
             <a:r>
               <a:rPr sz="1400"/>
-              <a:t>Demo nội bộ tháng 10/2026</a:t>
-            </a:r>
-          </a:p>
-          <a:p>
-            <a:r>
-              <a:rPr sz="1400"/>
-              <a:t>Bộ slide do Jarvis tự trình bày</a:t>
+              <a:t>Gợi ý trả lời khách, gợi ý câu hỏi phỏng vấn, biết ai đang nói</a:t>
             </a:r>
           </a:p>
         </p:txBody>
       </p:sp>
       <p:pic>
         <p:nvPicPr>
-          <p:cNvPr id="4" name="Picture 3" descr="UrBox Meeting Copilot: Trợ lý cuộc họp AI: nghe, ghi nhớ và gợi ý ngay trong buổi họp; Demo nội bộ tháng 10/2026; Bộ slide do Jarvis tự trình bày"/>
+          <p:cNvPr id="4" name="Picture 3" descr="UrBox Meeting Copilot: Trợ lý AI hỗ trợ ngay trong lúc họp; Gợi ý trả lời khách, gợi ý câu hỏi phỏng vấn, biết ai đang nói"/>
           <p:cNvPicPr>
             <a:picLocks noChangeAspect="1"/>
           </p:cNvPicPr>
@@ -4480,7 +4616,7 @@
           <a:lstStyle/>
           <a:p>
             <a:r>
-              <a:t>Chế độ BD: khách hỏi, trợ lý gợi ý câu trả lời</a:t>
+              <a:t>Biên bản tự nhắc khi buổi này nói khác điều đã chốt ở buổi trước</a:t>
             </a:r>
           </a:p>
         </p:txBody>
@@ -4509,38 +4645,32 @@
           <a:p>
             <a:r>
               <a:rPr sz="1400"/>
-              <a:t>Tự nhận ra câu hỏi của khách</a:t>
+              <a:t>Biên bản nhắc điều nói khác buổi trước</a:t>
             </a:r>
           </a:p>
           <a:p>
             <a:r>
               <a:rPr sz="1400"/>
-              <a:t>Trả lời từ tài liệu nhóm và các buổi trước, có nguồn</a:t>
+              <a:t>So với 12 buổi gần nhất của nhóm</a:t>
             </a:r>
           </a:p>
           <a:p>
             <a:r>
               <a:rPr sz="1400"/>
-              <a:t>Tra thêm trên mạng khi cần</a:t>
+              <a:t>Chỉ ghi vào biên bản</a:t>
             </a:r>
           </a:p>
           <a:p>
             <a:r>
               <a:rPr sz="1400"/>
-              <a:t>Bảng BD chỉ đội mình thấy</a:t>
-            </a:r>
-          </a:p>
-          <a:p>
-            <a:r>
-              <a:rPr sz="1400"/>
-              <a:t>Chủ nhóm hỏi báo cáo trên toàn bộ cuộc họp</a:t>
+              <a:t>Chủ nhóm hỏi trên toàn bộ cuộc họp</a:t>
             </a:r>
           </a:p>
         </p:txBody>
       </p:sp>
       <p:pic>
         <p:nvPicPr>
-          <p:cNvPr id="4" name="Picture 3" descr="Chế độ BD: khách hỏi, trợ lý gợi ý câu trả lời: Tự nhận ra câu hỏi của khách; Trả lời từ tài liệu nhóm và các buổi trước, có nguồn; Tra thêm trên mạng khi cần; Bảng BD chỉ đội mình thấy; Chủ nhóm hỏi báo cáo trên toàn bộ cuộc họp"/>
+          <p:cNvPr id="4" name="Picture 3" descr="Biên bản tự nhắc khi buổi này nói khác điều đã chốt ở buổi trước: Biên bản nhắc điều nói khác buổi trước; So với 12 buổi gần nhất của nhóm; Chỉ ghi vào biên bản; Chủ nhóm hỏi trên toàn bộ cuộc họp"/>
           <p:cNvPicPr>
             <a:picLocks noChangeAspect="1"/>
           </p:cNvPicPr>
@@ -4596,7 +4726,7 @@
           <a:lstStyle/>
           <a:p>
             <a:r>
-              <a:t>Dữ liệu cuộc họp ở trong phạm vi công ty</a:t>
+              <a:t>Gọi trợ lý bằng giọng nói tiếng Việt, tra cứu ngay trong buổi họp</a:t>
             </a:r>
           </a:p>
         </p:txBody>
@@ -4625,44 +4755,32 @@
           <a:p>
             <a:r>
               <a:rPr sz="1400"/>
-              <a:t>Chỉ tài khoản @urbox.vn đăng nhập</a:t>
+              <a:t>Gọi Jarvis bằng giọng nói tiếng Việt</a:t>
             </a:r>
           </a:p>
           <a:p>
             <a:r>
               <a:rPr sz="1400"/>
-              <a:t>Chỉ người tạo và thành viên nhóm xem cuộc họp</a:t>
+              <a:t>Tóm tắt, liệt kê việc cần làm</a:t>
             </a:r>
           </a:p>
           <a:p>
             <a:r>
               <a:rPr sz="1400"/>
-              <a:t>Ghi âm cần mọi người đồng ý, tự xóa sau 30 ngày</a:t>
+              <a:t>Tra cứu Jira qua MCP</a:t>
             </a:r>
           </a:p>
           <a:p>
             <a:r>
               <a:rPr sz="1400"/>
-              <a:t>Mẫu giọng cần người đó đồng ý</a:t>
-            </a:r>
-          </a:p>
-          <a:p>
-            <a:r>
-              <a:rPr sz="1400"/>
-              <a:t>Bảng BD không lên màn hình chung</a:t>
-            </a:r>
-          </a:p>
-          <a:p>
-            <a:r>
-              <a:rPr sz="1400"/>
-              <a:t>Tài liệu nhóm chỉ giữ phần chữ</a:t>
+              <a:t>Tra cứu trên mạng</a:t>
             </a:r>
           </a:p>
         </p:txBody>
       </p:sp>
       <p:pic>
         <p:nvPicPr>
-          <p:cNvPr id="4" name="Picture 3" descr="Dữ liệu cuộc họp ở trong phạm vi công ty: Chỉ tài khoản @urbox.vn đăng nhập; Chỉ người tạo và thành viên nhóm xem cuộc họp; Ghi âm cần mọi người đồng ý, tự xóa sau 30 ngày; Mẫu giọng cần người đó đồng ý; Bảng BD không lên màn hình chung; Tài liệu nhóm chỉ giữ phần chữ"/>
+          <p:cNvPr id="4" name="Picture 3" descr="Gọi trợ lý bằng giọng nói tiếng Việt, tra cứu ngay trong buổi họp: Gọi Jarvis bằng giọng nói tiếng Việt; Tóm tắt, liệt kê việc cần làm; Tra cứu Jira qua MCP; Tra cứu trên mạng"/>
           <p:cNvPicPr>
             <a:picLocks noChangeAspect="1"/>
           </p:cNvPicPr>
@@ -4718,7 +4836,7 @@
           <a:lstStyle/>
           <a:p>
             <a:r>
-              <a:t>Sẵn sàng dùng thử, cần thêm cuộc họp thật</a:t>
+              <a:t>Phần cơ bản giống các công cụ khác, kèm vài tiện ích bổ sung</a:t>
             </a:r>
           </a:p>
         </p:txBody>
@@ -4747,20 +4865,20 @@
           <a:p>
             <a:r>
               <a:rPr sz="1400"/>
-              <a:t>Đã có trên bản web: chép lời, trợ lý, biên bản, nhóm, chế độ BD</a:t>
+              <a:t>Cơ bản: chép lời, tóm tắt, biên bản, bot Google Meet, lưu Drive</a:t>
             </a:r>
           </a:p>
           <a:p>
             <a:r>
               <a:rPr sz="1400"/>
-              <a:t>Cần làm: thử cuộc họp thật, kiểm tra Google Drive và bot Meet, thống nhất với IT và Pháp chế</a:t>
+              <a:t>Tiện ích: slide, dashboard, sơ đồ tư duy, tự trình bày tệp</a:t>
             </a:r>
           </a:p>
         </p:txBody>
       </p:sp>
       <p:pic>
         <p:nvPicPr>
-          <p:cNvPr id="4" name="Picture 3" descr="Sẵn sàng dùng thử, cần thêm cuộc họp thật: Đã có trên bản web: chép lời, trợ lý, biên bản, nhóm, chế độ BD; Cần làm: thử cuộc họp thật, kiểm tra Google Drive và bot Meet, thống nhất với IT và Pháp chế"/>
+          <p:cNvPr id="4" name="Picture 3" descr="Phần cơ bản giống các công cụ khác, kèm vài tiện ích bổ sung: Cơ bản: chép lời, tóm tắt, biên bản, bot Google Meet, lưu Drive; Tiện ích: slide, dashboard, sơ đồ tư duy, tự trình bày tệp"/>
           <p:cNvPicPr>
             <a:picLocks noChangeAspect="1"/>
           </p:cNvPicPr>
@@ -4816,7 +4934,7 @@
           <a:lstStyle/>
           <a:p>
             <a:r>
-              <a:t>Demo trực tiếp</a:t>
+              <a:t>Biết rõ dữ liệu đi đâu, ai xem được</a:t>
             </a:r>
           </a:p>
         </p:txBody>
@@ -4845,25 +4963,239 @@
           <a:p>
             <a:r>
               <a:rPr sz="1400"/>
-              <a:t>Tạo cuộc họp, bật mic, chép lời</a:t>
+              <a:t>Gửi ra ngoài: Soniox, Anthropic, Recall, Google</a:t>
             </a:r>
           </a:p>
           <a:p>
             <a:r>
               <a:rPr sz="1400"/>
-              <a:t>Gọi Jarvis tóm tắt và vẽ dashboard</a:t>
+              <a:t>Chỉ tài khoản @urbox.vn</a:t>
             </a:r>
           </a:p>
           <a:p>
             <a:r>
               <a:rPr sz="1400"/>
-              <a:t>Kết thúc họp, xem biên bản</a:t>
+              <a:t>Ghi âm và mẫu giọng cần đồng ý</a:t>
             </a:r>
           </a:p>
           <a:p>
             <a:r>
               <a:rPr sz="1400"/>
-              <a:t>Bảng BD: khách hỏi giá, tra thêm trên mạng</a:t>
+              <a:t>Bảng BD không lên màn hình chung</a:t>
+            </a:r>
+          </a:p>
+        </p:txBody>
+      </p:sp>
+      <p:pic>
+        <p:nvPicPr>
+          <p:cNvPr id="4" name="Picture 3" descr="Biết rõ dữ liệu đi đâu, ai xem được: Gửi ra ngoài: Soniox, Anthropic, Recall, Google; Chỉ tài khoản @urbox.vn; Ghi âm và mẫu giọng cần đồng ý; Bảng BD không lên màn hình chung"/>
+          <p:cNvPicPr>
+            <a:picLocks noChangeAspect="1"/>
+          </p:cNvPicPr>
+          <p:nvPr/>
+        </p:nvPicPr>
+        <p:blipFill>
+          <a:blip r:embed="rId2"/>
+          <a:stretch>
+            <a:fillRect/>
+          </a:stretch>
+        </p:blipFill>
+        <p:spPr>
+          <a:xfrm>
+            <a:off x="0" y="0"/>
+            <a:ext cx="12192000" cy="6858000"/>
+          </a:xfrm>
+          <a:prstGeom prst="rect">
+            <a:avLst/>
+          </a:prstGeom>
+        </p:spPr>
+      </p:pic>
+    </p:spTree>
+  </p:cSld>
+  <p:clrMapOvr>
+    <a:masterClrMapping/>
+  </p:clrMapOvr>
+</p:sld>
+</file>
+
+<file path=ppt/slides/slide14.xml><?xml version="1.0" encoding="utf-8"?>
+<p:sld xmlns:a="http://schemas.openxmlformats.org/drawingml/2006/main" xmlns:p="http://schemas.openxmlformats.org/presentationml/2006/main" xmlns:r="http://schemas.openxmlformats.org/officeDocument/2006/relationships">
+  <p:cSld>
+    <p:spTree>
+      <p:nvGrpSpPr>
+        <p:cNvPr id="1" name=""/>
+        <p:cNvGrpSpPr/>
+        <p:nvPr/>
+      </p:nvGrpSpPr>
+      <p:grpSpPr/>
+      <p:sp>
+        <p:nvSpPr>
+          <p:cNvPr id="2" name="Title 1"/>
+          <p:cNvSpPr>
+            <a:spLocks noGrp="1"/>
+          </p:cNvSpPr>
+          <p:nvPr>
+            <p:ph type="title"/>
+          </p:nvPr>
+        </p:nvSpPr>
+        <p:spPr/>
+        <p:txBody>
+          <a:bodyPr/>
+          <a:lstStyle/>
+          <a:p>
+            <a:r>
+              <a:t>Đề xuất: thử ở team Engineering và team BD bằng cuộc họp thật</a:t>
+            </a:r>
+          </a:p>
+        </p:txBody>
+      </p:sp>
+      <p:sp>
+        <p:nvSpPr>
+          <p:cNvPr id="3" name="TextBox 2"/>
+          <p:cNvSpPr txBox="1"/>
+          <p:nvPr/>
+        </p:nvSpPr>
+        <p:spPr>
+          <a:xfrm>
+            <a:off x="600000" y="1500000"/>
+            <a:ext cx="10900000" cy="4500000"/>
+          </a:xfrm>
+          <a:prstGeom prst="rect">
+            <a:avLst/>
+          </a:prstGeom>
+          <a:noFill/>
+        </p:spPr>
+        <p:txBody>
+          <a:bodyPr wrap="square">
+            <a:spAutoFit/>
+          </a:bodyPr>
+          <a:lstStyle/>
+          <a:p>
+            <a:r>
+              <a:rPr sz="1400"/>
+              <a:t>Đã chạy: bản web, 376 test, BD và phỏng vấn</a:t>
+            </a:r>
+          </a:p>
+          <a:p>
+            <a:r>
+              <a:rPr sz="1400"/>
+              <a:t>Chưa kiểm chứng: Drive, Lịch, bot Meet thật</a:t>
+            </a:r>
+          </a:p>
+          <a:p>
+            <a:r>
+              <a:rPr sz="1400"/>
+              <a:t>Cần từ Engineering: review bảo mật, nối Jira, thử ở sprint review và phỏng vấn</a:t>
+            </a:r>
+          </a:p>
+        </p:txBody>
+      </p:sp>
+      <p:pic>
+        <p:nvPicPr>
+          <p:cNvPr id="4" name="Picture 3" descr="Đề xuất: thử ở team Engineering và team BD bằng cuộc họp thật: Đã chạy: bản web, 376 test, BD và phỏng vấn; Chưa kiểm chứng: Drive, Lịch, bot Meet thật; Cần từ Engineering: review bảo mật, nối Jira, thử ở sprint review và phỏng vấn"/>
+          <p:cNvPicPr>
+            <a:picLocks noChangeAspect="1"/>
+          </p:cNvPicPr>
+          <p:nvPr/>
+        </p:nvPicPr>
+        <p:blipFill>
+          <a:blip r:embed="rId2"/>
+          <a:stretch>
+            <a:fillRect/>
+          </a:stretch>
+        </p:blipFill>
+        <p:spPr>
+          <a:xfrm>
+            <a:off x="0" y="0"/>
+            <a:ext cx="12192000" cy="6858000"/>
+          </a:xfrm>
+          <a:prstGeom prst="rect">
+            <a:avLst/>
+          </a:prstGeom>
+        </p:spPr>
+      </p:pic>
+    </p:spTree>
+  </p:cSld>
+  <p:clrMapOvr>
+    <a:masterClrMapping/>
+  </p:clrMapOvr>
+</p:sld>
+</file>
+
+<file path=ppt/slides/slide15.xml><?xml version="1.0" encoding="utf-8"?>
+<p:sld xmlns:a="http://schemas.openxmlformats.org/drawingml/2006/main" xmlns:p="http://schemas.openxmlformats.org/presentationml/2006/main" xmlns:r="http://schemas.openxmlformats.org/officeDocument/2006/relationships">
+  <p:cSld>
+    <p:spTree>
+      <p:nvGrpSpPr>
+        <p:cNvPr id="1" name=""/>
+        <p:cNvGrpSpPr/>
+        <p:nvPr/>
+      </p:nvGrpSpPr>
+      <p:grpSpPr/>
+      <p:sp>
+        <p:nvSpPr>
+          <p:cNvPr id="2" name="Title 1"/>
+          <p:cNvSpPr>
+            <a:spLocks noGrp="1"/>
+          </p:cNvSpPr>
+          <p:nvPr>
+            <p:ph type="title"/>
+          </p:nvPr>
+        </p:nvSpPr>
+        <p:spPr/>
+        <p:txBody>
+          <a:bodyPr/>
+          <a:lstStyle/>
+          <a:p>
+            <a:r>
+              <a:t>Demo trực tiếp</a:t>
+            </a:r>
+          </a:p>
+        </p:txBody>
+      </p:sp>
+      <p:sp>
+        <p:nvSpPr>
+          <p:cNvPr id="3" name="TextBox 2"/>
+          <p:cNvSpPr txBox="1"/>
+          <p:nvPr/>
+        </p:nvSpPr>
+        <p:spPr>
+          <a:xfrm>
+            <a:off x="600000" y="1500000"/>
+            <a:ext cx="10900000" cy="4500000"/>
+          </a:xfrm>
+          <a:prstGeom prst="rect">
+            <a:avLst/>
+          </a:prstGeom>
+          <a:noFill/>
+        </p:spPr>
+        <p:txBody>
+          <a:bodyPr wrap="square">
+            <a:spAutoFit/>
+          </a:bodyPr>
+          <a:lstStyle/>
+          <a:p>
+            <a:r>
+              <a:rPr sz="1400"/>
+              <a:t>Demo: họp với khách</a:t>
+            </a:r>
+          </a:p>
+          <a:p>
+            <a:r>
+              <a:rPr sz="1400"/>
+              <a:t>Demo: phỏng vấn</a:t>
+            </a:r>
+          </a:p>
+          <a:p>
+            <a:r>
+              <a:rPr sz="1400"/>
+              <a:t>Demo: nhận ra người nói</a:t>
+            </a:r>
+          </a:p>
+          <a:p>
+            <a:r>
+              <a:rPr sz="1400"/>
+              <a:t>Demo: tóm tắt và biên bản</a:t>
             </a:r>
           </a:p>
           <a:p>
@@ -4876,7 +5208,7 @@
       </p:sp>
       <p:pic>
         <p:nvPicPr>
-          <p:cNvPr id="4" name="Picture 3" descr="Demo trực tiếp: Tạo cuộc họp, bật mic, chép lời; Gọi Jarvis tóm tắt và vẽ dashboard; Kết thúc họp, xem biên bản; Bảng BD: khách hỏi giá, tra thêm trên mạng; Hỏi đáp"/>
+          <p:cNvPr id="4" name="Picture 3" descr="Demo trực tiếp: Demo: họp với khách; Demo: phỏng vấn; Demo: nhận ra người nói; Demo: tóm tắt và biên bản; Hỏi đáp"/>
           <p:cNvPicPr>
             <a:picLocks noChangeAspect="1"/>
           </p:cNvPicPr>
@@ -4932,7 +5264,7 @@
           <a:lstStyle/>
           <a:p>
             <a:r>
-              <a:t>Mỗi cuộc họp đều để lại việc phải làm thêm</a:t>
+              <a:t>Ghi chú sau buổi họp đã có nhiều công cụ. Lúc cần trợ giúp nhất lại là trong buổi họp</a:t>
             </a:r>
           </a:p>
         </p:txBody>
@@ -4961,32 +5293,44 @@
           <a:p>
             <a:r>
               <a:rPr sz="1400"/>
-              <a:t>Ghi chép tay dễ sót ý</a:t>
+              <a:t>Công cụ ghi chú: chép lời, tóm tắt sau buổi họp</a:t>
             </a:r>
           </a:p>
           <a:p>
             <a:r>
               <a:rPr sz="1400"/>
-              <a:t>Biên bản đến muộn</a:t>
+              <a:t>Thiếu: trợ giúp ngay trong buổi họp</a:t>
             </a:r>
           </a:p>
           <a:p>
             <a:r>
               <a:rPr sz="1400"/>
-              <a:t>Quên điều đã chốt ở buổi trước</a:t>
+              <a:t>Khách hỏi điều BD chưa nắm</a:t>
             </a:r>
           </a:p>
           <a:p>
             <a:r>
               <a:rPr sz="1400"/>
-              <a:t>Khách hỏi, đội kinh doanh phải tra lại</a:t>
+              <a:t>Ứng viên nói thuật ngữ lạ</a:t>
+            </a:r>
+          </a:p>
+          <a:p>
+            <a:r>
+              <a:rPr sz="1400"/>
+              <a:t>Nói khác điều đã chốt</a:t>
+            </a:r>
+          </a:p>
+          <a:p>
+            <a:r>
+              <a:rPr sz="1400"/>
+              <a:t>Họp trực tiếp không rõ ai nói</a:t>
             </a:r>
           </a:p>
         </p:txBody>
       </p:sp>
       <p:pic>
         <p:nvPicPr>
-          <p:cNvPr id="4" name="Picture 3" descr="Mỗi cuộc họp đều để lại việc phải làm thêm: Ghi chép tay dễ sót ý; Biên bản đến muộn; Quên điều đã chốt ở buổi trước; Khách hỏi, đội kinh doanh phải tra lại"/>
+          <p:cNvPr id="4" name="Picture 3" descr="Ghi chú sau buổi họp đã có nhiều công cụ. Lúc cần trợ giúp nhất lại là trong buổi họp: Công cụ ghi chú: chép lời, tóm tắt sau buổi họp; Thiếu: trợ giúp ngay trong buổi họp; Khách hỏi điều BD chưa nắm; Ứng viên nói thuật ngữ lạ; Nói khác điều đã chốt; Họp trực tiếp không rõ ai nói"/>
           <p:cNvPicPr>
             <a:picLocks noChangeAspect="1"/>
           </p:cNvPicPr>
@@ -5042,7 +5386,7 @@
           <a:lstStyle/>
           <a:p>
             <a:r>
-              <a:t>Một trợ lý ngồi trong mọi cuộc họp</a:t>
+              <a:t>5 điểm khác so với các công cụ ghi chú họp phổ biến</a:t>
             </a:r>
           </a:p>
         </p:txBody>
@@ -5071,32 +5415,38 @@
           <a:p>
             <a:r>
               <a:rPr sz="1400"/>
-              <a:t>Nghe: chép lời theo thời gian thực, nhận ra từng người nói</a:t>
+              <a:t>Gợi ý trả lời ngay khi khách hỏi, từ tài liệu và buổi họp trước</a:t>
             </a:r>
           </a:p>
           <a:p>
             <a:r>
               <a:rPr sz="1400"/>
-              <a:t>Hiểu và làm: gọi Jarvis bằng giọng nói</a:t>
+              <a:t>Trợ lý riêng khi phỏng vấn</a:t>
             </a:r>
           </a:p>
           <a:p>
             <a:r>
               <a:rPr sz="1400"/>
-              <a:t>Ghi nhớ: biên bản tự động, lưu theo nhóm</a:t>
+              <a:t>Nhận ra người nói bằng mẫu giọng</a:t>
             </a:r>
           </a:p>
           <a:p>
             <a:r>
               <a:rPr sz="1400"/>
-              <a:t>Hỗ trợ bán hàng: bảng BD</a:t>
+              <a:t>Nhớ xuyên các cuộc họp</a:t>
+            </a:r>
+          </a:p>
+          <a:p>
+            <a:r>
+              <a:rPr sz="1400"/>
+              <a:t>Tiếng Việt, dữ liệu trên hạ tầng UrBox</a:t>
             </a:r>
           </a:p>
         </p:txBody>
       </p:sp>
       <p:pic>
         <p:nvPicPr>
-          <p:cNvPr id="4" name="Picture 3" descr="Một trợ lý ngồi trong mọi cuộc họp: Nghe: chép lời theo thời gian thực, nhận ra từng người nói; Hiểu và làm: gọi Jarvis bằng giọng nói; Ghi nhớ: biên bản tự động, lưu theo nhóm; Hỗ trợ bán hàng: bảng BD"/>
+          <p:cNvPr id="4" name="Picture 3" descr="5 điểm khác so với các công cụ ghi chú họp phổ biến: Gợi ý trả lời ngay khi khách hỏi, từ tài liệu và buổi họp trước; Trợ lý riêng khi phỏng vấn; Nhận ra người nói bằng mẫu giọng; Nhớ xuyên các cuộc họp; Tiếng Việt, dữ liệu trên hạ tầng UrBox"/>
           <p:cNvPicPr>
             <a:picLocks noChangeAspect="1"/>
           </p:cNvPicPr>
@@ -5152,7 +5502,7 @@
           <a:lstStyle/>
           <a:p>
             <a:r>
-              <a:t>Chép lời và nhận ra từng người nói</a:t>
+              <a:t>Khách hỏi điều BD chưa nắm: vài giây sau đã có gợi ý trả lời, kèm nguồn</a:t>
             </a:r>
           </a:p>
         </p:txBody>
@@ -5181,32 +5531,32 @@
           <a:p>
             <a:r>
               <a:rPr sz="1400"/>
-              <a:t>Chữ hiện ngay khi đang nói</a:t>
+              <a:t>Khách hỏi: phí tích hợp API bao nhiêu</a:t>
             </a:r>
           </a:p>
           <a:p>
             <a:r>
               <a:rPr sz="1400"/>
-              <a:t>Tự nhận ra người đã lưu mẫu giọng</a:t>
+              <a:t>Sau 4-8 giây: gợi ý 5.000.000đ, nguồn bảng giá</a:t>
             </a:r>
           </a:p>
           <a:p>
             <a:r>
               <a:rPr sz="1400"/>
-              <a:t>AI đoán tên người nói</a:t>
+              <a:t>Ghi chú: buổi trước đã báo 4.000.000đ</a:t>
             </a:r>
           </a:p>
           <a:p>
             <a:r>
               <a:rPr sz="1400"/>
-              <a:t>Sửa người nói trong một cú bấm</a:t>
+              <a:t>BD trả lời ngay, có nguồn</a:t>
             </a:r>
           </a:p>
         </p:txBody>
       </p:sp>
       <p:pic>
         <p:nvPicPr>
-          <p:cNvPr id="4" name="Picture 3" descr="Chép lời và nhận ra từng người nói: Chữ hiện ngay khi đang nói; Tự nhận ra người đã lưu mẫu giọng; AI đoán tên người nói; Sửa người nói trong một cú bấm"/>
+          <p:cNvPr id="4" name="Picture 3" descr="Khách hỏi điều BD chưa nắm: vài giây sau đã có gợi ý trả lời, kèm nguồn: Khách hỏi: phí tích hợp API bao nhiêu; Sau 4-8 giây: gợi ý 5.000.000đ, nguồn bảng giá; Ghi chú: buổi trước đã báo 4.000.000đ; BD trả lời ngay, có nguồn"/>
           <p:cNvPicPr>
             <a:picLocks noChangeAspect="1"/>
           </p:cNvPicPr>
@@ -5262,7 +5612,7 @@
           <a:lstStyle/>
           <a:p>
             <a:r>
-              <a:t>Gọi Jarvis bằng giọng nói, như gọi một đồng nghiệp</a:t>
+              <a:t>Câu trả lời chỉ lấy từ nguồn của UrBox, và chỉ đội mình thấy</a:t>
             </a:r>
           </a:p>
         </p:txBody>
@@ -5291,32 +5641,44 @@
           <a:p>
             <a:r>
               <a:rPr sz="1400"/>
-              <a:t>Jarvis ơi, tóm tắt các quyết định từ đầu buổi</a:t>
+              <a:t>Nhận ra câu hỏi của khách</a:t>
             </a:r>
           </a:p>
           <a:p>
             <a:r>
               <a:rPr sz="1400"/>
-              <a:t>Liệt kê việc cần làm, người phụ trách và hạn chót</a:t>
+              <a:t>Tìm trong tài liệu nhóm và các buổi trước</a:t>
             </a:r>
           </a:p>
           <a:p>
             <a:r>
               <a:rPr sz="1400"/>
-              <a:t>Vẽ dashboard tiến độ sprint</a:t>
+              <a:t>Viết gợi ý có nguồn</a:t>
             </a:r>
           </a:p>
           <a:p>
             <a:r>
               <a:rPr sz="1400"/>
-              <a:t>Tra cứu trên mạng tỷ giá USD hôm nay</a:t>
+              <a:t>Tra thêm trên mạng khi bấm</a:t>
+            </a:r>
+          </a:p>
+          <a:p>
+            <a:r>
+              <a:rPr sz="1400"/>
+              <a:t>Chủ nhóm hỏi trên toàn bộ cuộc họp</a:t>
+            </a:r>
+          </a:p>
+          <a:p>
+            <a:r>
+              <a:rPr sz="1400"/>
+              <a:t>Khoảng 250đ mỗi câu gợi ý</a:t>
             </a:r>
           </a:p>
         </p:txBody>
       </p:sp>
       <p:pic>
         <p:nvPicPr>
-          <p:cNvPr id="4" name="Picture 3" descr="Gọi Jarvis bằng giọng nói, như gọi một đồng nghiệp: Jarvis ơi, tóm tắt các quyết định từ đầu buổi; Liệt kê việc cần làm, người phụ trách và hạn chót; Vẽ dashboard tiến độ sprint; Tra cứu trên mạng tỷ giá USD hôm nay"/>
+          <p:cNvPr id="4" name="Picture 3" descr="Câu trả lời chỉ lấy từ nguồn của UrBox, và chỉ đội mình thấy: Nhận ra câu hỏi của khách; Tìm trong tài liệu nhóm và các buổi trước; Viết gợi ý có nguồn; Tra thêm trên mạng khi bấm; Chủ nhóm hỏi trên toàn bộ cuộc họp; Khoảng 250đ mỗi câu gợi ý"/>
           <p:cNvPicPr>
             <a:picLocks noChangeAspect="1"/>
           </p:cNvPicPr>
@@ -5372,7 +5734,7 @@
           <a:lstStyle/>
           <a:p>
             <a:r>
-              <a:t>Nói một câu, có ngay slide, dashboard, sơ đồ</a:t>
+              <a:t>Phỏng vấn: gợi ý câu hỏi đào sâu và giải thích thuật ngữ ngay trong buổi</a:t>
             </a:r>
           </a:p>
         </p:txBody>
@@ -5401,32 +5763,32 @@
           <a:p>
             <a:r>
               <a:rPr sz="1400"/>
-              <a:t>Slide</a:t>
+              <a:t>Gợi ý câu hỏi đào sâu theo JD</a:t>
             </a:r>
           </a:p>
           <a:p>
             <a:r>
               <a:rPr sz="1400"/>
-              <a:t>Dashboard</a:t>
+              <a:t>Giải thích thuật ngữ, tra thêm trên mạng</a:t>
             </a:r>
           </a:p>
           <a:p>
             <a:r>
               <a:rPr sz="1400"/>
-              <a:t>Sơ đồ tư duy</a:t>
+              <a:t>Trả lời câu hỏi của ứng viên theo JD</a:t>
             </a:r>
           </a:p>
           <a:p>
             <a:r>
               <a:rPr sz="1400"/>
-              <a:t>Sửa bằng lời, mỗi lần sửa là một phiên bản mới</a:t>
+              <a:t>4 câu song song trong 7-9 giây</a:t>
             </a:r>
           </a:p>
         </p:txBody>
       </p:sp>
       <p:pic>
         <p:nvPicPr>
-          <p:cNvPr id="4" name="Picture 3" descr="Nói một câu, có ngay slide, dashboard, sơ đồ: Slide; Dashboard; Sơ đồ tư duy; Sửa bằng lời, mỗi lần sửa là một phiên bản mới"/>
+          <p:cNvPr id="4" name="Picture 3" descr="Phỏng vấn: gợi ý câu hỏi đào sâu và giải thích thuật ngữ ngay trong buổi: Gợi ý câu hỏi đào sâu theo JD; Giải thích thuật ngữ, tra thêm trên mạng; Trả lời câu hỏi của ứng viên theo JD; 4 câu song song trong 7-9 giây"/>
           <p:cNvPicPr>
             <a:picLocks noChangeAspect="1"/>
           </p:cNvPicPr>
@@ -5482,7 +5844,7 @@
           <a:lstStyle/>
           <a:p>
             <a:r>
-              <a:t>Chiếu lên màn hình chung và tự thuyết trình</a:t>
+              <a:t>Biết ai đang nói nhờ mẫu giọng, kể cả người lần đầu tham gia</a:t>
             </a:r>
           </a:p>
         </p:txBody>
@@ -5511,26 +5873,44 @@
           <a:p>
             <a:r>
               <a:rPr sz="1400"/>
-              <a:t>Thuyết trình: đọc lời trình bày từng slide</a:t>
+              <a:t>Mỗi câu nói tính vector giọng 192 số</a:t>
             </a:r>
           </a:p>
           <a:p>
             <a:r>
               <a:rPr sz="1400"/>
-              <a:t>Tự chuyển slide theo lời nói</a:t>
+              <a:t>So với hồ sơ giọng nói toàn công ty</a:t>
             </a:r>
           </a:p>
           <a:p>
             <a:r>
               <a:rPr sz="1400"/>
-              <a:t>Mở PDF, PowerPoint trên máy để trình bày</a:t>
+              <a:t>Khớp thì hiện đúng tên</a:t>
+            </a:r>
+          </a:p>
+          <a:p>
+            <a:r>
+              <a:rPr sz="1400"/>
+              <a:t>Người mới: AI đoán tên, lưu mẫu giọng khi đồng ý</a:t>
+            </a:r>
+          </a:p>
+          <a:p>
+            <a:r>
+              <a:rPr sz="1400"/>
+              <a:t>97% và 98% câu gán đúng người</a:t>
+            </a:r>
+          </a:p>
+          <a:p>
+            <a:r>
+              <a:rPr sz="1400"/>
+              <a:t>Chỉ lưu vector, không lưu âm thanh</a:t>
             </a:r>
           </a:p>
         </p:txBody>
       </p:sp>
       <p:pic>
         <p:nvPicPr>
-          <p:cNvPr id="4" name="Picture 3" descr="Chiếu lên màn hình chung và tự thuyết trình: Thuyết trình: đọc lời trình bày từng slide; Tự chuyển slide theo lời nói; Mở PDF, PowerPoint trên máy để trình bày"/>
+          <p:cNvPr id="4" name="Picture 3" descr="Biết ai đang nói nhờ mẫu giọng, kể cả người lần đầu tham gia: Mỗi câu nói tính vector giọng 192 số; So với hồ sơ giọng nói toàn công ty; Khớp thì hiện đúng tên; Người mới: AI đoán tên, lưu mẫu giọng khi đồng ý; 97% và 98% câu gán đúng người; Chỉ lưu vector, không lưu âm thanh"/>
           <p:cNvPicPr>
             <a:picLocks noChangeAspect="1"/>
           </p:cNvPicPr>
@@ -5586,7 +5966,7 @@
           <a:lstStyle/>
           <a:p>
             <a:r>
-              <a:t>Họp xong là có biên bản, kèm điều nói khác buổi trước</a:t>
+              <a:t>Mọi thứ chạy trong lúc họp: số đo thực tế</a:t>
             </a:r>
           </a:p>
         </p:txBody>
@@ -5615,26 +5995,44 @@
           <a:p>
             <a:r>
               <a:rPr sz="1400"/>
-              <a:t>Biên bản tự động: tóm tắt, quyết định, phân công, rủi ro</a:t>
+              <a:t>Chữ hiện theo thời gian thực</a:t>
             </a:r>
           </a:p>
           <a:p>
             <a:r>
               <a:rPr sz="1400"/>
-              <a:t>So với tối đa 12 buổi trước của nhóm</a:t>
+              <a:t>Vector giọng 0,11 giây cho mỗi giây âm thanh</a:t>
             </a:r>
           </a:p>
           <a:p>
             <a:r>
               <a:rPr sz="1400"/>
-              <a:t>Tải Word, lưu Google Drive hoặc thư mục trên máy</a:t>
+              <a:t>Gợi ý trả lời 4-8 giây</a:t>
+            </a:r>
+          </a:p>
+          <a:p>
+            <a:r>
+              <a:rPr sz="1400"/>
+              <a:t>4 câu song song 7-9 giây</a:t>
+            </a:r>
+          </a:p>
+          <a:p>
+            <a:r>
+              <a:rPr sz="1400"/>
+              <a:t>Tra thêm trên mạng 15-25 giây</a:t>
+            </a:r>
+          </a:p>
+          <a:p>
+            <a:r>
+              <a:rPr sz="1400"/>
+              <a:t>Khoảng 250đ mỗi câu gợi ý</a:t>
             </a:r>
           </a:p>
         </p:txBody>
       </p:sp>
       <p:pic>
         <p:nvPicPr>
-          <p:cNvPr id="4" name="Picture 3" descr="Họp xong là có biên bản, kèm điều nói khác buổi trước: Biên bản tự động: tóm tắt, quyết định, phân công, rủi ro; So với tối đa 12 buổi trước của nhóm; Tải Word, lưu Google Drive hoặc thư mục trên máy"/>
+          <p:cNvPr id="4" name="Picture 3" descr="Mọi thứ chạy trong lúc họp: số đo thực tế: Chữ hiện theo thời gian thực; Vector giọng 0,11 giây cho mỗi giây âm thanh; Gợi ý trả lời 4-8 giây; 4 câu song song 7-9 giây; Tra thêm trên mạng 15-25 giây; Khoảng 250đ mỗi câu gợi ý"/>
           <p:cNvPicPr>
             <a:picLocks noChangeAspect="1"/>
           </p:cNvPicPr>
@@ -5690,7 +6088,7 @@
           <a:lstStyle/>
           <a:p>
             <a:r>
-              <a:t>Nhóm cuộc họp, Google Drive và bot vào Google Meet</a:t>
+              <a:t>Kiến trúc gọn: một server, dịch vụ AI qua API, dữ liệu ở Atlas của UrBox</a:t>
             </a:r>
           </a:p>
         </p:txBody>
@@ -5719,32 +6117,38 @@
           <a:p>
             <a:r>
               <a:rPr sz="1400"/>
-              <a:t>Nhóm theo chủ đề, phòng ban</a:t>
+              <a:t>Mic trình duyệt và bot Google Meet qua WebSocket</a:t>
             </a:r>
           </a:p>
           <a:p>
             <a:r>
               <a:rPr sz="1400"/>
-              <a:t>Thư mục nhóm trên Google Drive</a:t>
+              <a:t>Server FastAPI, Docker trên Render</a:t>
             </a:r>
           </a:p>
           <a:p>
             <a:r>
               <a:rPr sz="1400"/>
-              <a:t>Bot theo lịch Google vào Google Meet</a:t>
+              <a:t>Soniox, Claude Sonnet 5.5, MongoDB Atlas, Google Drive</a:t>
             </a:r>
           </a:p>
           <a:p>
             <a:r>
               <a:rPr sz="1400"/>
-              <a:t>Họp nửa online nửa trực tiếp</a:t>
+              <a:t>Dữ liệu nội bộ qua MCP</a:t>
+            </a:r>
+          </a:p>
+          <a:p>
+            <a:r>
+              <a:rPr sz="1400"/>
+              <a:t>376 test tự động</a:t>
             </a:r>
           </a:p>
         </p:txBody>
       </p:sp>
       <p:pic>
         <p:nvPicPr>
-          <p:cNvPr id="4" name="Picture 3" descr="Nhóm cuộc họp, Google Drive và bot vào Google Meet: Nhóm theo chủ đề, phòng ban; Thư mục nhóm trên Google Drive; Bot theo lịch Google vào Google Meet; Họp nửa online nửa trực tiếp"/>
+          <p:cNvPr id="4" name="Picture 3" descr="Kiến trúc gọn: một server, dịch vụ AI qua API, dữ liệu ở Atlas của UrBox: Mic trình duyệt và bot Google Meet qua WebSocket; Server FastAPI, Docker trên Render; Soniox, Claude Sonnet 5.5, MongoDB Atlas, Google Drive; Dữ liệu nội bộ qua MCP; 376 test tự động"/>
           <p:cNvPicPr>
             <a:picLocks noChangeAspect="1"/>
           </p:cNvPicPr>
